--- a/output/hackathon-flexclip-en/NeonShift_Hackathon_EN.pptx
+++ b/output/hackathon-flexclip-en/NeonShift_Hackathon_EN.pptx
@@ -610,7 +610,7 @@
           </a:p>
           <a:p>
             <a:r>
-              <a:t>Start with a walk or a run. Follow your pace, complete daily goals, and build your progress over time. Your starter shoes and level upgrades are free. Each session adds to a journey you can see, rather than another number to forget.</a:t>
+              <a:t>Start with a walk or a run. Our next design adds a personal Activity journal with monthly views and workout details. Choose automatic sync when online, with saved workouts processed oldest first. Starter shoes and level upgrades remain free.</a:t>
             </a:r>
           </a:p>
           <a:p/>
@@ -621,7 +621,7 @@
           </a:p>
           <a:p>
             <a:r>
-              <a:t>右側為舊版 Gear UI，尚非 Wild Guardians 系列。正式影片替換為本次提交版本：運動頁 → 每日目標 → 等級進度。GPS 運動追蹤不等同 Health Connect 申領依據。</a:t>
+              <a:t>設計預覽與示例資料，非實機。Activity 月份／篩選／詳情；連網自動同步預設關閉，開啟後依運動開始時間由舊到新。補拍 17→18→19 與較早失敗阻擋後續；不得把摘要同步當成 Health Connect 打卡或自動錢包簽署。</a:t>
             </a:r>
           </a:p>
         </p:txBody>
@@ -794,7 +794,7 @@
           </a:p>
           <a:p>
             <a:r>
-              <a:t>As you level up, discover Wild Guardians: shoes inspired by threatened wildlife, from the Asian elephant to the hawksbill turtle. Each design introduces an animal, the pressures on its habitat, and a small action you can take. These personal finishes are cosmetic. They connect your progress with a story worth remembering, and a world worth caring about.</a:t>
+              <a:t>As you level up, discover Wild Guardians, inspired by threatened wildlife. Our next design lets you switch between shoes you have earned, with matching forest or ocean backgrounds. Prefer a simpler view? Turn the background off. These choices are cosmetic; your active level still controls eligibility. Each shoe connects your progress with conservation learning.</a:t>
             </a:r>
           </a:p>
           <a:p/>
@@ -805,7 +805,7 @@
           </a:p>
           <a:p>
             <a:r>
-              <a:t>本頁使用專案既有設計圖。正式影片補已解鎖鞋款、鞋面特寫與物種故事卡；圖不可冒充實機。使用試拆時標 DEMO PREVIEW，切帳號標 Prepared demo account。不稱隨機 NFT、付費抽獎或保育收益權。</a:t>
+              <a:t>本頁使用專案既有鞋款素材；多鞋切換、森林／海洋背景與關閉開關為待實作設計。正式影片補切兩雙已取得鞋→關背景→故事卡；圖不可冒充實機。使用試拆時標 DEMO PREVIEW，切帳號標 Prepared demo account。不稱隨機 NFT、付費抽獎或保育收益權。</a:t>
             </a:r>
           </a:p>
         </p:txBody>
@@ -4858,8 +4858,8 @@
         </p:nvSpPr>
         <p:spPr>
           <a:xfrm>
-            <a:off x="508000" y="1111250"/>
-            <a:ext cx="7048500" cy="1206500"/>
+            <a:off x="508000" y="1035050"/>
+            <a:ext cx="11176000" cy="615950"/>
           </a:xfrm>
           <a:prstGeom prst="rect">
             <a:avLst/>
@@ -4874,7 +4874,7 @@
           <a:p>
             <a:pPr>
               <a:lnSpc>
-                <a:spcPts val="4550"/>
+                <a:spcPts val="4450"/>
               </a:lnSpc>
               <a:spcBef>
                 <a:spcPts val="0"/>
@@ -4884,19 +4884,42 @@
               </a:spcAft>
             </a:pPr>
             <a:r>
-              <a:rPr sz="3700" b="1">
+              <a:rPr sz="3600" b="1">
                 <a:solidFill>
                   <a:srgbClr val="F3F7FF"/>
                 </a:solidFill>
                 <a:latin typeface="Arial"/>
               </a:rPr>
-              <a:t>Every session</a:t>
-            </a:r>
-          </a:p>
+              <a:t>Your movement. Your history.</a:t>
+            </a:r>
+          </a:p>
+        </p:txBody>
+      </p:sp>
+      <p:sp>
+        <p:nvSpPr>
+          <p:cNvPr id="8" name="TextBox 7"/>
+          <p:cNvSpPr txBox="1"/>
+          <p:nvPr/>
+        </p:nvSpPr>
+        <p:spPr>
+          <a:xfrm>
+            <a:off x="539750" y="1752600"/>
+            <a:ext cx="10985500" cy="260350"/>
+          </a:xfrm>
+          <a:prstGeom prst="rect">
+            <a:avLst/>
+          </a:prstGeom>
+          <a:noFill/>
+        </p:spPr>
+        <p:txBody>
+          <a:bodyPr wrap="none" lIns="0" rIns="0" tIns="0" bIns="0">
+            <a:spAutoFit/>
+          </a:bodyPr>
+          <a:lstStyle/>
           <a:p>
             <a:pPr>
               <a:lnSpc>
-                <a:spcPts val="4550"/>
+                <a:spcPts val="1650"/>
               </a:lnSpc>
               <a:spcBef>
                 <a:spcPts val="0"/>
@@ -4906,27 +4929,27 @@
               </a:spcAft>
             </a:pPr>
             <a:r>
-              <a:rPr sz="3700" b="1">
-                <a:solidFill>
-                  <a:srgbClr val="F3F7FF"/>
+              <a:rPr sz="1350" b="1">
+                <a:solidFill>
+                  <a:srgbClr val="FFD080"/>
                 </a:solidFill>
                 <a:latin typeface="Arial"/>
               </a:rPr>
-              <a:t>moves you forward.</a:t>
-            </a:r>
-          </a:p>
-        </p:txBody>
-      </p:sp>
-      <p:sp>
-        <p:nvSpPr>
-          <p:cNvPr id="8" name="Rectangle 7"/>
+              <a:t>NEXT DESIGN · ACTIVITY + OPTIONAL AUTO-SYNC</a:t>
+            </a:r>
+          </a:p>
+        </p:txBody>
+      </p:sp>
+      <p:sp>
+        <p:nvSpPr>
+          <p:cNvPr id="9" name="Rectangle 8"/>
           <p:cNvSpPr/>
           <p:nvPr/>
         </p:nvSpPr>
         <p:spPr>
           <a:xfrm>
-            <a:off x="508000" y="2635250"/>
-            <a:ext cx="7112000" cy="876300"/>
+            <a:off x="508000" y="2286000"/>
+            <a:ext cx="5397500" cy="3238500"/>
           </a:xfrm>
           <a:prstGeom prst="rect">
             <a:avLst/>
@@ -4962,14 +4985,14 @@
       </p:sp>
       <p:sp>
         <p:nvSpPr>
-          <p:cNvPr id="9" name="TextBox 8"/>
+          <p:cNvPr id="10" name="TextBox 9"/>
           <p:cNvSpPr txBox="1"/>
           <p:nvPr/>
         </p:nvSpPr>
         <p:spPr>
           <a:xfrm>
-            <a:off x="711200" y="2774950"/>
-            <a:ext cx="6667500" cy="279400"/>
+            <a:off x="711200" y="2476500"/>
+            <a:ext cx="4953000" cy="317500"/>
           </a:xfrm>
           <a:prstGeom prst="rect">
             <a:avLst/>
@@ -4984,7 +5007,7 @@
           <a:p>
             <a:pPr>
               <a:lnSpc>
-                <a:spcPts val="1800"/>
+                <a:spcPts val="2100"/>
               </a:lnSpc>
               <a:spcBef>
                 <a:spcPts val="0"/>
@@ -4994,27 +5017,27 @@
               </a:spcAft>
             </a:pPr>
             <a:r>
-              <a:rPr sz="1450" b="1">
+              <a:rPr sz="1700" b="1">
                 <a:solidFill>
                   <a:srgbClr val="35E5C5"/>
                 </a:solidFill>
                 <a:latin typeface="Arial"/>
               </a:rPr>
-              <a:t>01  WALK OR RUN</a:t>
-            </a:r>
-          </a:p>
-        </p:txBody>
-      </p:sp>
-      <p:sp>
-        <p:nvSpPr>
-          <p:cNvPr id="10" name="TextBox 9"/>
+              <a:t>ACTIVITY</a:t>
+            </a:r>
+          </a:p>
+        </p:txBody>
+      </p:sp>
+      <p:sp>
+        <p:nvSpPr>
+          <p:cNvPr id="11" name="TextBox 10"/>
           <p:cNvSpPr txBox="1"/>
           <p:nvPr/>
         </p:nvSpPr>
         <p:spPr>
           <a:xfrm>
-            <a:off x="711200" y="3111500"/>
-            <a:ext cx="6667500" cy="298450"/>
+            <a:off x="711200" y="2882900"/>
+            <a:ext cx="4953000" cy="292100"/>
           </a:xfrm>
           <a:prstGeom prst="rect">
             <a:avLst/>
@@ -5029,7 +5052,7 @@
           <a:p>
             <a:pPr>
               <a:lnSpc>
-                <a:spcPts val="1950"/>
+                <a:spcPts val="1900"/>
               </a:lnSpc>
               <a:spcBef>
                 <a:spcPts val="0"/>
@@ -5039,27 +5062,162 @@
               </a:spcAft>
             </a:pPr>
             <a:r>
-              <a:rPr sz="1600" b="0">
+              <a:rPr sz="1550" b="0">
                 <a:solidFill>
                   <a:srgbClr val="F3F7FF"/>
                 </a:solidFill>
                 <a:latin typeface="Arial"/>
               </a:rPr>
-              <a:t>Start with everyday movement.</a:t>
-            </a:r>
-          </a:p>
-        </p:txBody>
-      </p:sp>
-      <p:sp>
-        <p:nvSpPr>
-          <p:cNvPr id="11" name="Rectangle 10"/>
+              <a:t>Month view · Filters · Workout details</a:t>
+            </a:r>
+          </a:p>
+        </p:txBody>
+      </p:sp>
+      <p:sp>
+        <p:nvSpPr>
+          <p:cNvPr id="12" name="TextBox 11"/>
+          <p:cNvSpPr txBox="1"/>
+          <p:nvPr/>
+        </p:nvSpPr>
+        <p:spPr>
+          <a:xfrm>
+            <a:off x="711200" y="3479800"/>
+            <a:ext cx="4953000" cy="285750"/>
+          </a:xfrm>
+          <a:prstGeom prst="rect">
+            <a:avLst/>
+          </a:prstGeom>
+          <a:noFill/>
+        </p:spPr>
+        <p:txBody>
+          <a:bodyPr wrap="none" lIns="0" rIns="0" tIns="0" bIns="0">
+            <a:spAutoFit/>
+          </a:bodyPr>
+          <a:lstStyle/>
+          <a:p>
+            <a:pPr>
+              <a:lnSpc>
+                <a:spcPts val="1850"/>
+              </a:lnSpc>
+              <a:spcBef>
+                <a:spcPts val="0"/>
+              </a:spcBef>
+              <a:spcAft>
+                <a:spcPts val="0"/>
+              </a:spcAft>
+            </a:pPr>
+            <a:r>
+              <a:rPr sz="1500" b="0">
+                <a:solidFill>
+                  <a:srgbClr val="A8B6CF"/>
+                </a:solidFill>
+                <a:latin typeface="Arial"/>
+              </a:rPr>
+              <a:t>SEP 17   RUN     5.00 km   30:00</a:t>
+            </a:r>
+          </a:p>
+        </p:txBody>
+      </p:sp>
+      <p:sp>
+        <p:nvSpPr>
+          <p:cNvPr id="13" name="TextBox 12"/>
+          <p:cNvSpPr txBox="1"/>
+          <p:nvPr/>
+        </p:nvSpPr>
+        <p:spPr>
+          <a:xfrm>
+            <a:off x="711200" y="4006850"/>
+            <a:ext cx="4953000" cy="285750"/>
+          </a:xfrm>
+          <a:prstGeom prst="rect">
+            <a:avLst/>
+          </a:prstGeom>
+          <a:noFill/>
+        </p:spPr>
+        <p:txBody>
+          <a:bodyPr wrap="none" lIns="0" rIns="0" tIns="0" bIns="0">
+            <a:spAutoFit/>
+          </a:bodyPr>
+          <a:lstStyle/>
+          <a:p>
+            <a:pPr>
+              <a:lnSpc>
+                <a:spcPts val="1850"/>
+              </a:lnSpc>
+              <a:spcBef>
+                <a:spcPts val="0"/>
+              </a:spcBef>
+              <a:spcAft>
+                <a:spcPts val="0"/>
+              </a:spcAft>
+            </a:pPr>
+            <a:r>
+              <a:rPr sz="1500" b="0">
+                <a:solidFill>
+                  <a:srgbClr val="A8B6CF"/>
+                </a:solidFill>
+                <a:latin typeface="Arial"/>
+              </a:rPr>
+              <a:t>SEP 18   WALK    2.40 km   28:00</a:t>
+            </a:r>
+          </a:p>
+        </p:txBody>
+      </p:sp>
+      <p:sp>
+        <p:nvSpPr>
+          <p:cNvPr id="14" name="TextBox 13"/>
+          <p:cNvSpPr txBox="1"/>
+          <p:nvPr/>
+        </p:nvSpPr>
+        <p:spPr>
+          <a:xfrm>
+            <a:off x="711200" y="4533900"/>
+            <a:ext cx="4953000" cy="285750"/>
+          </a:xfrm>
+          <a:prstGeom prst="rect">
+            <a:avLst/>
+          </a:prstGeom>
+          <a:noFill/>
+        </p:spPr>
+        <p:txBody>
+          <a:bodyPr wrap="none" lIns="0" rIns="0" tIns="0" bIns="0">
+            <a:spAutoFit/>
+          </a:bodyPr>
+          <a:lstStyle/>
+          <a:p>
+            <a:pPr>
+              <a:lnSpc>
+                <a:spcPts val="1850"/>
+              </a:lnSpc>
+              <a:spcBef>
+                <a:spcPts val="0"/>
+              </a:spcBef>
+              <a:spcAft>
+                <a:spcPts val="0"/>
+              </a:spcAft>
+            </a:pPr>
+            <a:r>
+              <a:rPr sz="1500" b="0">
+                <a:solidFill>
+                  <a:srgbClr val="A8B6CF"/>
+                </a:solidFill>
+                <a:latin typeface="Arial"/>
+              </a:rPr>
+              <a:t>SEP 19   RUN     3.00 km   19:00</a:t>
+            </a:r>
+          </a:p>
+        </p:txBody>
+      </p:sp>
+      <p:sp>
+        <p:nvSpPr>
+          <p:cNvPr id="15" name="Rectangle 14"/>
           <p:cNvSpPr/>
           <p:nvPr/>
         </p:nvSpPr>
         <p:spPr>
           <a:xfrm>
-            <a:off x="508000" y="3651250"/>
-            <a:ext cx="7112000" cy="876300"/>
+            <a:off x="6286500" y="2286000"/>
+            <a:ext cx="5397500" cy="3238500"/>
           </a:xfrm>
           <a:prstGeom prst="rect">
             <a:avLst/>
@@ -5095,59 +5253,14 @@
       </p:sp>
       <p:sp>
         <p:nvSpPr>
-          <p:cNvPr id="12" name="TextBox 11"/>
+          <p:cNvPr id="16" name="TextBox 15"/>
           <p:cNvSpPr txBox="1"/>
           <p:nvPr/>
         </p:nvSpPr>
         <p:spPr>
           <a:xfrm>
-            <a:off x="711200" y="3790949"/>
-            <a:ext cx="6667500" cy="279400"/>
-          </a:xfrm>
-          <a:prstGeom prst="rect">
-            <a:avLst/>
-          </a:prstGeom>
-          <a:noFill/>
-        </p:spPr>
-        <p:txBody>
-          <a:bodyPr wrap="none" lIns="0" rIns="0" tIns="0" bIns="0">
-            <a:spAutoFit/>
-          </a:bodyPr>
-          <a:lstStyle/>
-          <a:p>
-            <a:pPr>
-              <a:lnSpc>
-                <a:spcPts val="1800"/>
-              </a:lnSpc>
-              <a:spcBef>
-                <a:spcPts val="0"/>
-              </a:spcBef>
-              <a:spcAft>
-                <a:spcPts val="0"/>
-              </a:spcAft>
-            </a:pPr>
-            <a:r>
-              <a:rPr sz="1450" b="1">
-                <a:solidFill>
-                  <a:srgbClr val="35E5C5"/>
-                </a:solidFill>
-                <a:latin typeface="Arial"/>
-              </a:rPr>
-              <a:t>02  COMPLETE DAILY GOALS</a:t>
-            </a:r>
-          </a:p>
-        </p:txBody>
-      </p:sp>
-      <p:sp>
-        <p:nvSpPr>
-          <p:cNvPr id="13" name="TextBox 12"/>
-          <p:cNvSpPr txBox="1"/>
-          <p:nvPr/>
-        </p:nvSpPr>
-        <p:spPr>
-          <a:xfrm>
-            <a:off x="711200" y="4127500"/>
-            <a:ext cx="6667500" cy="298450"/>
+            <a:off x="6489700" y="2476500"/>
+            <a:ext cx="4953000" cy="298450"/>
           </a:xfrm>
           <a:prstGeom prst="rect">
             <a:avLst/>
@@ -5172,70 +5285,27 @@
               </a:spcAft>
             </a:pPr>
             <a:r>
-              <a:rPr sz="1600" b="0">
-                <a:solidFill>
-                  <a:srgbClr val="F3F7FF"/>
+              <a:rPr sz="1600" b="1">
+                <a:solidFill>
+                  <a:srgbClr val="35E5C5"/>
                 </a:solidFill>
                 <a:latin typeface="Arial"/>
               </a:rPr>
-              <a:t>Build a habit you can see.</a:t>
-            </a:r>
-          </a:p>
-        </p:txBody>
-      </p:sp>
-      <p:sp>
-        <p:nvSpPr>
-          <p:cNvPr id="14" name="Rectangle 13"/>
-          <p:cNvSpPr/>
-          <p:nvPr/>
-        </p:nvSpPr>
-        <p:spPr>
-          <a:xfrm>
-            <a:off x="508000" y="4667250"/>
-            <a:ext cx="7112000" cy="876300"/>
-          </a:xfrm>
-          <a:prstGeom prst="rect">
-            <a:avLst/>
-          </a:prstGeom>
-          <a:solidFill>
-            <a:srgbClr val="111A2B"/>
-          </a:solidFill>
-          <a:ln>
-            <a:noFill/>
-          </a:ln>
-        </p:spPr>
-        <p:style>
-          <a:lnRef idx="1">
-            <a:schemeClr val="accent1"/>
-          </a:lnRef>
-          <a:fillRef idx="3">
-            <a:schemeClr val="accent1"/>
-          </a:fillRef>
-          <a:effectRef idx="2">
-            <a:schemeClr val="accent1"/>
-          </a:effectRef>
-          <a:fontRef idx="minor">
-            <a:schemeClr val="lt1"/>
-          </a:fontRef>
-        </p:style>
-        <p:txBody>
-          <a:bodyPr rtlCol="0" anchor="ctr"/>
-          <a:lstStyle/>
-          <a:p>
-            <a:pPr algn="ctr"/>
-          </a:p>
-        </p:txBody>
-      </p:sp>
-      <p:sp>
-        <p:nvSpPr>
-          <p:cNvPr id="15" name="TextBox 14"/>
+              <a:t>AUTO-SYNC WHEN ONLINE</a:t>
+            </a:r>
+          </a:p>
+        </p:txBody>
+      </p:sp>
+      <p:sp>
+        <p:nvSpPr>
+          <p:cNvPr id="17" name="TextBox 16"/>
           <p:cNvSpPr txBox="1"/>
           <p:nvPr/>
         </p:nvSpPr>
         <p:spPr>
           <a:xfrm>
-            <a:off x="711200" y="4806950"/>
-            <a:ext cx="6667500" cy="279400"/>
+            <a:off x="6489700" y="2882900"/>
+            <a:ext cx="4953000" cy="317500"/>
           </a:xfrm>
           <a:prstGeom prst="rect">
             <a:avLst/>
@@ -5250,7 +5320,7 @@
           <a:p>
             <a:pPr>
               <a:lnSpc>
-                <a:spcPts val="1800"/>
+                <a:spcPts val="2100"/>
               </a:lnSpc>
               <a:spcBef>
                 <a:spcPts val="0"/>
@@ -5260,27 +5330,72 @@
               </a:spcAft>
             </a:pPr>
             <a:r>
-              <a:rPr sz="1450" b="1">
-                <a:solidFill>
-                  <a:srgbClr val="35E5C5"/>
+              <a:rPr sz="1700" b="0">
+                <a:solidFill>
+                  <a:srgbClr val="F3F7FF"/>
                 </a:solidFill>
                 <a:latin typeface="Arial"/>
               </a:rPr>
-              <a:t>03  LEVEL UP YOUR SHOES</a:t>
-            </a:r>
-          </a:p>
-        </p:txBody>
-      </p:sp>
-      <p:sp>
-        <p:nvSpPr>
-          <p:cNvPr id="16" name="TextBox 15"/>
+              <a:t>Your choice: OFF / ON</a:t>
+            </a:r>
+          </a:p>
+        </p:txBody>
+      </p:sp>
+      <p:sp>
+        <p:nvSpPr>
+          <p:cNvPr id="18" name="TextBox 17"/>
           <p:cNvSpPr txBox="1"/>
           <p:nvPr/>
         </p:nvSpPr>
         <p:spPr>
           <a:xfrm>
-            <a:off x="711200" y="5143500"/>
-            <a:ext cx="6667500" cy="298450"/>
+            <a:off x="6489700" y="3505200"/>
+            <a:ext cx="4953000" cy="355600"/>
+          </a:xfrm>
+          <a:prstGeom prst="rect">
+            <a:avLst/>
+          </a:prstGeom>
+          <a:noFill/>
+        </p:spPr>
+        <p:txBody>
+          <a:bodyPr wrap="none" lIns="0" rIns="0" tIns="0" bIns="0">
+            <a:spAutoFit/>
+          </a:bodyPr>
+          <a:lstStyle/>
+          <a:p>
+            <a:pPr>
+              <a:lnSpc>
+                <a:spcPts val="2400"/>
+              </a:lnSpc>
+              <a:spcBef>
+                <a:spcPts val="0"/>
+              </a:spcBef>
+              <a:spcAft>
+                <a:spcPts val="0"/>
+              </a:spcAft>
+            </a:pPr>
+            <a:r>
+              <a:rPr sz="1950" b="1">
+                <a:solidFill>
+                  <a:srgbClr val="F3F7FF"/>
+                </a:solidFill>
+                <a:latin typeface="Arial"/>
+              </a:rPr>
+              <a:t>Oldest workout first</a:t>
+            </a:r>
+          </a:p>
+        </p:txBody>
+      </p:sp>
+      <p:sp>
+        <p:nvSpPr>
+          <p:cNvPr id="19" name="TextBox 18"/>
+          <p:cNvSpPr txBox="1"/>
+          <p:nvPr/>
+        </p:nvSpPr>
+        <p:spPr>
+          <a:xfrm>
+            <a:off x="6489700" y="3968750"/>
+            <a:ext cx="4953000" cy="298450"/>
           </a:xfrm>
           <a:prstGeom prst="rect">
             <a:avLst/>
@@ -5307,92 +5422,25 @@
             <a:r>
               <a:rPr sz="1600" b="0">
                 <a:solidFill>
-                  <a:srgbClr val="F3F7FF"/>
+                  <a:srgbClr val="35E5C5"/>
                 </a:solidFill>
                 <a:latin typeface="Arial"/>
               </a:rPr>
-              <a:t>Free starter shoes. Free level upgrades.</a:t>
-            </a:r>
-          </a:p>
-        </p:txBody>
-      </p:sp>
-      <p:sp>
-        <p:nvSpPr>
-          <p:cNvPr id="17" name="Rectangle 16"/>
-          <p:cNvSpPr/>
-          <p:nvPr/>
-        </p:nvSpPr>
-        <p:spPr>
-          <a:xfrm>
-            <a:off x="8445500" y="920750"/>
-            <a:ext cx="2698750" cy="5111750"/>
-          </a:xfrm>
-          <a:prstGeom prst="rect">
-            <a:avLst/>
-          </a:prstGeom>
-          <a:solidFill>
-            <a:srgbClr val="111A2B"/>
-          </a:solidFill>
-          <a:ln>
-            <a:noFill/>
-          </a:ln>
-        </p:spPr>
-        <p:style>
-          <a:lnRef idx="1">
-            <a:schemeClr val="accent1"/>
-          </a:lnRef>
-          <a:fillRef idx="3">
-            <a:schemeClr val="accent1"/>
-          </a:fillRef>
-          <a:effectRef idx="2">
-            <a:schemeClr val="accent1"/>
-          </a:effectRef>
-          <a:fontRef idx="minor">
-            <a:schemeClr val="lt1"/>
-          </a:fontRef>
-        </p:style>
-        <p:txBody>
-          <a:bodyPr rtlCol="0" anchor="ctr"/>
-          <a:lstStyle/>
-          <a:p>
-            <a:pPr algn="ctr"/>
-          </a:p>
-        </p:txBody>
-      </p:sp>
-      <p:pic>
-        <p:nvPicPr>
-          <p:cNvPr id="18" name="Picture 17" descr="gear.png"/>
-          <p:cNvPicPr>
-            <a:picLocks noChangeAspect="1"/>
-          </p:cNvPicPr>
-          <p:nvPr/>
-        </p:nvPicPr>
-        <p:blipFill>
-          <a:blip r:embed="rId2"/>
-          <a:stretch>
-            <a:fillRect/>
-          </a:stretch>
-        </p:blipFill>
-        <p:spPr>
-          <a:xfrm>
-            <a:off x="8743950" y="1016000"/>
-            <a:ext cx="2095499" cy="4667250"/>
-          </a:xfrm>
-          <a:prstGeom prst="rect">
-            <a:avLst/>
-          </a:prstGeom>
-        </p:spPr>
-      </p:pic>
-      <p:sp>
-        <p:nvSpPr>
-          <p:cNvPr id="19" name="TextBox 18"/>
+              <a:t>SEP 17  &gt;  SEP 18  &gt;  SEP 19</a:t>
+            </a:r>
+          </a:p>
+        </p:txBody>
+      </p:sp>
+      <p:sp>
+        <p:nvSpPr>
+          <p:cNvPr id="20" name="TextBox 19"/>
           <p:cNvSpPr txBox="1"/>
           <p:nvPr/>
         </p:nvSpPr>
         <p:spPr>
           <a:xfrm>
-            <a:off x="8318499" y="5842000"/>
-            <a:ext cx="3492500" cy="215900"/>
+            <a:off x="6489700" y="4597400"/>
+            <a:ext cx="4953000" cy="285750"/>
           </a:xfrm>
           <a:prstGeom prst="rect">
             <a:avLst/>
@@ -5407,7 +5455,7 @@
           <a:p>
             <a:pPr>
               <a:lnSpc>
-                <a:spcPts val="1300"/>
+                <a:spcPts val="1850"/>
               </a:lnSpc>
               <a:spcBef>
                 <a:spcPts val="0"/>
@@ -5417,13 +5465,58 @@
               </a:spcAft>
             </a:pPr>
             <a:r>
-              <a:rPr sz="1050" b="1">
-                <a:solidFill>
-                  <a:srgbClr val="FFD080"/>
+              <a:rPr sz="1500" b="0">
+                <a:solidFill>
+                  <a:srgbClr val="A8B6CF"/>
                 </a:solidFill>
                 <a:latin typeface="Arial"/>
               </a:rPr>
-              <a:t>EARLY GEAR UI · SEP 14, 2026</a:t>
+              <a:t>Retry safely. Keep records in order.</a:t>
+            </a:r>
+          </a:p>
+        </p:txBody>
+      </p:sp>
+      <p:sp>
+        <p:nvSpPr>
+          <p:cNvPr id="21" name="TextBox 20"/>
+          <p:cNvSpPr txBox="1"/>
+          <p:nvPr/>
+        </p:nvSpPr>
+        <p:spPr>
+          <a:xfrm>
+            <a:off x="539750" y="5829300"/>
+            <a:ext cx="11049000" cy="241300"/>
+          </a:xfrm>
+          <a:prstGeom prst="rect">
+            <a:avLst/>
+          </a:prstGeom>
+          <a:noFill/>
+        </p:spPr>
+        <p:txBody>
+          <a:bodyPr wrap="none" lIns="0" rIns="0" tIns="0" bIns="0">
+            <a:spAutoFit/>
+          </a:bodyPr>
+          <a:lstStyle/>
+          <a:p>
+            <a:pPr>
+              <a:lnSpc>
+                <a:spcPts val="1500"/>
+              </a:lnSpc>
+              <a:spcBef>
+                <a:spcPts val="0"/>
+              </a:spcBef>
+              <a:spcAft>
+                <a:spcPts val="0"/>
+              </a:spcAft>
+            </a:pPr>
+            <a:r>
+              <a:rPr sz="1200" b="1">
+                <a:solidFill>
+                  <a:srgbClr val="FFD080"/>
+                </a:solidFill>
+                <a:latin typeface="Arial"/>
+              </a:rPr>
+              <a:t>DESIGN PREVIEW · SAMPLE DATA · IMPLEMENTATION PENDING</a:t>
             </a:r>
           </a:p>
         </p:txBody>
@@ -7113,7 +7206,7 @@
         <p:spPr>
           <a:xfrm>
             <a:off x="539750" y="1765300"/>
-            <a:ext cx="10985500" cy="355600"/>
+            <a:ext cx="10985500" cy="260350"/>
           </a:xfrm>
           <a:prstGeom prst="rect">
             <a:avLst/>
@@ -7128,7 +7221,7 @@
           <a:p>
             <a:pPr>
               <a:lnSpc>
-                <a:spcPts val="2400"/>
+                <a:spcPts val="1650"/>
               </a:lnSpc>
               <a:spcBef>
                 <a:spcPts val="0"/>
@@ -7138,13 +7231,13 @@
               </a:spcAft>
             </a:pPr>
             <a:r>
-              <a:rPr sz="1950" b="0">
-                <a:solidFill>
-                  <a:srgbClr val="A8B6CF"/>
+              <a:rPr sz="1350" b="1">
+                <a:solidFill>
+                  <a:srgbClr val="FFD080"/>
                 </a:solidFill>
                 <a:latin typeface="Arial"/>
               </a:rPr>
-              <a:t>Wildlife-inspired shoes. Conservation learning.</a:t>
+              <a:t>NEXT DESIGN · SWITCH EARNED SHOES + MATCHING BACKGROUNDS</a:t>
             </a:r>
           </a:p>
         </p:txBody>
@@ -7301,7 +7394,7 @@
                 </a:solidFill>
                 <a:latin typeface="Arial"/>
               </a:rPr>
-              <a:t>Learn about habitat fragmentation.</a:t>
+              <a:t>Forest theme · Earned shoe selection</a:t>
             </a:r>
           </a:p>
         </p:txBody>
@@ -7458,7 +7551,7 @@
                 </a:solidFill>
                 <a:latin typeface="Arial"/>
               </a:rPr>
-              <a:t>Learn about threats to coastal habitats.</a:t>
+              <a:t>Ocean theme · Background ON / OFF</a:t>
             </a:r>
           </a:p>
         </p:txBody>
@@ -7503,7 +7596,7 @@
                 </a:solidFill>
                 <a:latin typeface="Arial"/>
               </a:rPr>
-              <a:t>COSMETIC SHOE DESIGNS · DESIGN ASSETS, NOT DEVICE CAPTURES</a:t>
+              <a:t>DESIGN PREVIEW · COSMETIC ONLY · ACTIVE LEVEL CONTROLS ELIGIBILITY</a:t>
             </a:r>
           </a:p>
         </p:txBody>

--- a/output/hackathon-flexclip-en/NeonShift_Hackathon_EN.pptx
+++ b/output/hackathon-flexclip-en/NeonShift_Hackathon_EN.pptx
@@ -610,7 +610,7 @@
           </a:p>
           <a:p>
             <a:r>
-              <a:t>Start with a walk or a run. Our next design adds a personal Activity journal with monthly views and workout details. Choose automatic sync when online, with saved workouts processed oldest first. Starter shoes and level upgrades remain free.</a:t>
+              <a:t>Start with a walk or a run. The app now includes a personal Activity journal with monthly views and workout details. Choose automatic sync when online, with saved workouts processed oldest first. Starter shoes and level upgrades remain free.</a:t>
             </a:r>
           </a:p>
           <a:p/>
@@ -794,7 +794,7 @@
           </a:p>
           <a:p>
             <a:r>
-              <a:t>As you level up, discover Wild Guardians, inspired by threatened wildlife. Our next design lets you switch between shoes you have earned, with matching forest or ocean backgrounds. Prefer a simpler view? Turn the background off. These choices are cosmetic; your active level still controls eligibility. Each shoe connects your progress with conservation learning.</a:t>
+              <a:t>As you level up, discover Wild Guardians, inspired by threatened wildlife. The app now lets you switch between shoes you have earned, with matching forest or ocean backgrounds. Prefer a simpler view? Turn the background off. These choices are cosmetic; your active level still controls eligibility. Each shoe connects your progress with conservation learning.</a:t>
             </a:r>
           </a:p>
           <a:p/>
@@ -805,7 +805,7 @@
           </a:p>
           <a:p>
             <a:r>
-              <a:t>本頁使用專案既有鞋款素材；多鞋切換、森林／海洋背景與關閉開關為待實作設計。正式影片補切兩雙已取得鞋→關背景→故事卡；圖不可冒充實機。使用試拆時標 DEMO PREVIEW，切帳號標 Prepared demo account。不稱隨機 NFT、付費抽獎或保育收益權。</a:t>
+              <a:t>本頁使用專案既有鞋款素材；多鞋切換、森林／海洋背景與關閉開關已有程式；本頁仍是示意，提交版本實機待驗收。正式影片補切兩雙已取得鞋→關背景→故事卡；圖不可冒充實機。使用試拆時標 DEMO PREVIEW，切帳號標 Prepared demo account。不稱隨機 NFT、付費抽獎或保育收益權。</a:t>
             </a:r>
           </a:p>
         </p:txBody>
@@ -5516,7 +5516,7 @@
                 </a:solidFill>
                 <a:latin typeface="Arial"/>
               </a:rPr>
-              <a:t>DESIGN PREVIEW · SAMPLE DATA · IMPLEMENTATION PENDING</a:t>
+              <a:t>DESIGN PREVIEW · SAMPLE DATA · DEVICE VALIDATION PENDING</a:t>
             </a:r>
           </a:p>
         </p:txBody>
